--- a/downloads/DCT_V1_Ch14_Slides.pptx
+++ b/downloads/DCT_V1_Ch14_Slides.pptx
@@ -130,7 +130,7 @@
   <p:extLst>
     <p:ext uri="{521415D9-36F7-43E2-AB2F-B90AF26B5E84}">
       <p14:sectionLst xmlns:p14="http://schemas.microsoft.com/office/powerpoint/2010/main">
-        <p14:section name="Opening" id="{5dbb0279-e60a-5f3d-a188-a093de1b00bf}">
+        <p14:section name="Opening" id="{164ace50-1941-fc86-8f68-0309722a959e}">
           <p14:sldIdLst>
             <p14:sldId id="256"/>
             <p14:sldId id="257"/>
@@ -138,55 +138,55 @@
             <p14:sldId id="259"/>
           </p14:sldIdLst>
         </p14:section>
-        <p14:section name="14.1 Why Analyze Before Optimizing" id="{53c4972d-3ba5-5877-bb88-78e91d4f845d}">
+        <p14:section name="14.1 Why Analyze Before Optimizing" id="{611a5053-cbb8-985b-b5f4-873da8e36616}">
           <p14:sldIdLst>
             <p14:sldId id="260"/>
           </p14:sldIdLst>
         </p14:section>
-        <p14:section name="14.2 The Analytical Setting" id="{e7d68adc-53b7-c25a-817c-86c069e52a30}">
+        <p14:section name="14.2 The Analytical Setting" id="{abef1b84-9000-c237-3566-6324b215c504}">
           <p14:sldIdLst>
             <p14:sldId id="261"/>
           </p14:sldIdLst>
         </p14:section>
-        <p14:section name="14.3 Existence and Uniqueness" id="{dc0ca8e0-5052-a1c3-2b21-91299961c94f}">
+        <p14:section name="14.3 Existence and Uniqueness" id="{8e1857b5-18ab-e9a3-2b5b-4a05c3f19168}">
           <p14:sldIdLst>
             <p14:sldId id="262"/>
           </p14:sldIdLst>
         </p14:section>
-        <p14:section name="14.4 Enterprise Stability" id="{937129f5-0c41-f86e-261d-95254a3ecf82}">
+        <p14:section name="14.4 Enterprise Stability" id="{d7021a19-8071-8cfa-3f7e-be20959b9852}">
           <p14:sldIdLst>
             <p14:sldId id="263"/>
             <p14:sldId id="264"/>
           </p14:sldIdLst>
         </p14:section>
-        <p14:section name="14.5 Sensitivity and Perturbation" id="{ccd59287-7550-8197-5147-38b00f89c865}">
+        <p14:section name="14.5 Sensitivity and Perturbation" id="{f61a07ec-4ad8-7d54-7332-43f0fa46de60}">
           <p14:sldIdLst>
             <p14:sldId id="265"/>
             <p14:sldId id="266"/>
           </p14:sldIdLst>
         </p14:section>
-        <p14:section name="14.6 Feasibility and Viability" id="{ebae439b-110b-5fad-4f8c-0ca4e3b1e66d}">
+        <p14:section name="14.6 Feasibility and Viability" id="{d1cd34f6-ad83-8f58-01be-f0548a8c6224}">
           <p14:sldIdLst>
             <p14:sldId id="267"/>
             <p14:sldId id="268"/>
           </p14:sldIdLst>
         </p14:section>
-        <p14:section name="14.7 Structural Consistency and Invariants" id="{9655033f-1c0f-a252-c45e-53b7e2b63c74}">
+        <p14:section name="14.7 Structural Consistency and Invariants" id="{03c5f437-4bf1-70da-7fe6-6391716fdfbb}">
           <p14:sldIdLst>
             <p14:sldId id="269"/>
           </p14:sldIdLst>
         </p14:section>
-        <p14:section name="14.8 Convergence" id="{6a6ff4d7-f86a-f8da-0331-c20a6c770448}">
+        <p14:section name="14.8 Convergence" id="{d125a4e8-1313-7497-afd8-ea14058c60d3}">
           <p14:sldIdLst>
             <p14:sldId id="270"/>
           </p14:sldIdLst>
         </p14:section>
-        <p14:section name="14.9 From Analysis to Optimization" id="{2c8c36db-d84a-5e7c-340f-f0d7f1ed2b9c}">
+        <p14:section name="14.9 From Analysis to Optimization" id="{d3325748-efaa-ac36-4d0a-ce8c2119a669}">
           <p14:sldIdLst>
             <p14:sldId id="271"/>
           </p14:sldIdLst>
         </p14:section>
-        <p14:section name="Worked Example 14.1" id="{b7522ab4-793e-899b-bee4-abc49c7a605a}">
+        <p14:section name="Worked Example 14.1" id="{dda1d388-3c54-bf7a-c98a-22e8254d44a1}">
           <p14:sldIdLst>
             <p14:sldId id="272"/>
             <p14:sldId id="273"/>
@@ -194,12 +194,12 @@
             <p14:sldId id="275"/>
           </p14:sldIdLst>
         </p14:section>
-        <p14:section name="AXIOM Lab 1.14" id="{d41b1ada-799c-882d-31aa-db04054239d5}">
+        <p14:section name="AXIOM Lab 1.14" id="{43340a28-2f69-656c-b811-cfbef507cc96}">
           <p14:sldIdLst>
             <p14:sldId id="276"/>
           </p14:sldIdLst>
         </p14:section>
-        <p14:section name="Close" id="{d9082916-313e-9fbc-f99e-1028467c221a}">
+        <p14:section name="Close" id="{aa30229c-a53f-4064-f4a6-d5ac64d4bd0c}">
           <p14:sldIdLst>
             <p14:sldId id="277"/>
             <p14:sldId id="278"/>

--- a/downloads/DCT_V1_Ch14_Slides.pptx
+++ b/downloads/DCT_V1_Ch14_Slides.pptx
@@ -130,7 +130,7 @@
   <p:extLst>
     <p:ext uri="{521415D9-36F7-43E2-AB2F-B90AF26B5E84}">
       <p14:sectionLst xmlns:p14="http://schemas.microsoft.com/office/powerpoint/2010/main">
-        <p14:section name="Opening" id="{164ace50-1941-fc86-8f68-0309722a959e}">
+        <p14:section name="Opening" id="{db5d03a4-a588-ff54-70f3-d1d2f63ec0a9}">
           <p14:sldIdLst>
             <p14:sldId id="256"/>
             <p14:sldId id="257"/>
@@ -138,55 +138,55 @@
             <p14:sldId id="259"/>
           </p14:sldIdLst>
         </p14:section>
-        <p14:section name="14.1 Why Analyze Before Optimizing" id="{611a5053-cbb8-985b-b5f4-873da8e36616}">
+        <p14:section name="14.1 Why Analyze Before Optimizing" id="{83a44155-dd3a-cc5d-eec0-a4be96fd8b71}">
           <p14:sldIdLst>
             <p14:sldId id="260"/>
           </p14:sldIdLst>
         </p14:section>
-        <p14:section name="14.2 The Analytical Setting" id="{abef1b84-9000-c237-3566-6324b215c504}">
+        <p14:section name="14.2 The Analytical Setting" id="{3c5f3ec5-fd47-5524-40b1-995d8a88e6ef}">
           <p14:sldIdLst>
             <p14:sldId id="261"/>
           </p14:sldIdLst>
         </p14:section>
-        <p14:section name="14.3 Existence and Uniqueness" id="{8e1857b5-18ab-e9a3-2b5b-4a05c3f19168}">
+        <p14:section name="14.3 Existence and Uniqueness" id="{7e66b492-1686-17ce-5c59-d30897b96e09}">
           <p14:sldIdLst>
             <p14:sldId id="262"/>
           </p14:sldIdLst>
         </p14:section>
-        <p14:section name="14.4 Enterprise Stability" id="{d7021a19-8071-8cfa-3f7e-be20959b9852}">
+        <p14:section name="14.4 Enterprise Stability" id="{13d485d9-716c-5042-cc67-7808fde612b0}">
           <p14:sldIdLst>
             <p14:sldId id="263"/>
             <p14:sldId id="264"/>
           </p14:sldIdLst>
         </p14:section>
-        <p14:section name="14.5 Sensitivity and Perturbation" id="{f61a07ec-4ad8-7d54-7332-43f0fa46de60}">
+        <p14:section name="14.5 Sensitivity and Perturbation" id="{968af20a-d164-57fb-1cc8-3a0a23591447}">
           <p14:sldIdLst>
             <p14:sldId id="265"/>
             <p14:sldId id="266"/>
           </p14:sldIdLst>
         </p14:section>
-        <p14:section name="14.6 Feasibility and Viability" id="{d1cd34f6-ad83-8f58-01be-f0548a8c6224}">
+        <p14:section name="14.6 Feasibility and Viability" id="{a234e8b0-4af9-17aa-24b1-95cf4616820c}">
           <p14:sldIdLst>
             <p14:sldId id="267"/>
             <p14:sldId id="268"/>
           </p14:sldIdLst>
         </p14:section>
-        <p14:section name="14.7 Structural Consistency and Invariants" id="{03c5f437-4bf1-70da-7fe6-6391716fdfbb}">
+        <p14:section name="14.7 Structural Consistency and Invariants" id="{6cabba1f-db92-16c2-183f-8223706a17f0}">
           <p14:sldIdLst>
             <p14:sldId id="269"/>
           </p14:sldIdLst>
         </p14:section>
-        <p14:section name="14.8 Convergence" id="{d125a4e8-1313-7497-afd8-ea14058c60d3}">
+        <p14:section name="14.8 Convergence" id="{94826aba-c573-af93-cfe1-379b46146669}">
           <p14:sldIdLst>
             <p14:sldId id="270"/>
           </p14:sldIdLst>
         </p14:section>
-        <p14:section name="14.9 From Analysis to Optimization" id="{d3325748-efaa-ac36-4d0a-ce8c2119a669}">
+        <p14:section name="14.9 From Analysis to Optimization" id="{97509e02-b6a7-a8b5-144e-73ec3a36a185}">
           <p14:sldIdLst>
             <p14:sldId id="271"/>
           </p14:sldIdLst>
         </p14:section>
-        <p14:section name="Worked Example 14.1" id="{dda1d388-3c54-bf7a-c98a-22e8254d44a1}">
+        <p14:section name="Worked Example 14.1" id="{d754acc4-37c6-50b4-e837-7c2a16cd955b}">
           <p14:sldIdLst>
             <p14:sldId id="272"/>
             <p14:sldId id="273"/>
@@ -194,12 +194,12 @@
             <p14:sldId id="275"/>
           </p14:sldIdLst>
         </p14:section>
-        <p14:section name="AXIOM Lab 1.14" id="{43340a28-2f69-656c-b811-cfbef507cc96}">
+        <p14:section name="AXIOM Lab 1.14" id="{d573b8ce-b121-4afc-f4c1-6283e21e07e5}">
           <p14:sldIdLst>
             <p14:sldId id="276"/>
           </p14:sldIdLst>
         </p14:section>
-        <p14:section name="Close" id="{aa30229c-a53f-4064-f4a6-d5ac64d4bd0c}">
+        <p14:section name="Close" id="{87999fb8-0775-4491-0b92-f536cf7152b3}">
           <p14:sldIdLst>
             <p14:sldId id="277"/>
             <p14:sldId id="278"/>
